--- a/chatgpt/kpmg-slidegen/outputs/smoke-layout-flex/deck.pptx
+++ b/chatgpt/kpmg-slidegen/outputs/smoke-layout-flex/deck.pptx
@@ -3225,7 +3225,7 @@
               <a:buNone/>
             </a:pPr>
             <a:r>
-              <a:rPr lang="en-US" sz="4000" b="1" dirty="0">
+              <a:rPr lang="en-US" sz="3100" b="1" dirty="0">
                 <a:solidFill>
                   <a:srgbClr val="FFFFFF"/>
                 </a:solidFill>
@@ -3233,9 +3233,43 @@
                 <a:ea typeface="Arial" pitchFamily="34" charset="-122"/>
                 <a:cs typeface="Arial" pitchFamily="34" charset="-120"/>
               </a:rPr>
-              <a:t>Lorem Ipsum Comprehensive Validation Deck</a:t>
-            </a:r>
-            <a:endParaRPr lang="en-US" sz="4000" dirty="0"/>
+              <a:t>Lorem Ipsum</a:t>
+            </a:r>
+            <a:endParaRPr lang="en-US" sz="3100" dirty="0"/>
+          </a:p>
+          <a:p>
+            <a:pPr algn="l" indent="0" marL="0">
+              <a:buNone/>
+            </a:pPr>
+            <a:r>
+              <a:rPr lang="en-US" sz="3100" b="1" dirty="0">
+                <a:solidFill>
+                  <a:srgbClr val="FFFFFF"/>
+                </a:solidFill>
+                <a:latin typeface="Arial" pitchFamily="34" charset="0"/>
+                <a:ea typeface="Arial" pitchFamily="34" charset="-122"/>
+                <a:cs typeface="Arial" pitchFamily="34" charset="-120"/>
+              </a:rPr>
+              <a:t>Comprehensive</a:t>
+            </a:r>
+            <a:endParaRPr lang="en-US" sz="3100" dirty="0"/>
+          </a:p>
+          <a:p>
+            <a:pPr algn="l" indent="0" marL="0">
+              <a:buNone/>
+            </a:pPr>
+            <a:r>
+              <a:rPr lang="en-US" sz="3100" b="1" dirty="0">
+                <a:solidFill>
+                  <a:srgbClr val="FFFFFF"/>
+                </a:solidFill>
+                <a:latin typeface="Arial" pitchFamily="34" charset="0"/>
+                <a:ea typeface="Arial" pitchFamily="34" charset="-122"/>
+                <a:cs typeface="Arial" pitchFamily="34" charset="-120"/>
+              </a:rPr>
+              <a:t>Validation Deck</a:t>
+            </a:r>
+            <a:endParaRPr lang="en-US" sz="3100" dirty="0"/>
           </a:p>
         </p:txBody>
       </p:sp>
@@ -3483,8 +3517,8 @@
           </p:nvPr>
         </p:nvGraphicFramePr>
         <p:xfrm>
-          <a:off x="995361" y="3978688"/>
-          <a:ext cx="5036400" cy="2197170"/>
+          <a:off x="995361" y="4170712"/>
+          <a:ext cx="5036400" cy="2005146"/>
         </p:xfrm>
         <a:graphic>
           <a:graphicData uri="http://schemas.openxmlformats.org/drawingml/2006/table">
@@ -10867,7 +10901,7 @@
         </p:nvGraphicFramePr>
         <p:xfrm>
           <a:off x="6400800" y="1716786"/>
-          <a:ext cx="4800600" cy="4184752"/>
+          <a:ext cx="4800600" cy="4230472"/>
         </p:xfrm>
         <a:graphic xmlns:a="http://schemas.openxmlformats.org/drawingml/2006/main">
           <a:graphicData uri="http://schemas.openxmlformats.org/drawingml/2006/chart">
@@ -10883,7 +10917,7 @@
         </p:nvSpPr>
         <p:spPr>
           <a:xfrm>
-            <a:off x="6400800" y="5947258"/>
+            <a:off x="6400800" y="5992978"/>
             <a:ext cx="4800600" cy="182880"/>
           </a:xfrm>
           <a:prstGeom prst="rect">
